--- a/decks/hist-dictatorship/hist-dictatorship_ch6_stalin-rule.pptx
+++ b/decks/hist-dictatorship/hist-dictatorship_ch6_stalin-rule.pptx
@@ -128,30 +128,30 @@
   <p:extLst>
     <p:ext uri="{521415D9-36F7-43E2-AB2F-B90AF26B5E84}">
       <p14:sectionLst xmlns:p14="http://schemas.microsoft.com/office/powerpoint/2010/main">
-        <p14:section name="Opening" id="{82116e32-820f-e389-edf1-ae01b3ae01c0}">
+        <p14:section name="Opening" id="{7f1d29f3-04c1-bbdd-cf90-c3e968d3d487}">
           <p14:sldIdLst>
             <p14:sldId id="256"/>
           </p14:sldIdLst>
         </p14:section>
-        <p14:section name="Gate" id="{2f72800b-6196-a136-a600-5526a4799e2e}">
+        <p14:section name="Gate" id="{f023a980-ac25-3271-b080-74cec2427cd3}">
           <p14:sldIdLst>
             <p14:sldId id="257"/>
             <p14:sldId id="258"/>
           </p14:sldIdLst>
         </p14:section>
-        <p14:section name="Pre-teach" id="{1b96e5b6-1ec1-79c2-6114-7817611237bd}">
+        <p14:section name="Pre-teach" id="{cb2b82f2-2922-dd8f-2026-b1386f2fed90}">
           <p14:sldIdLst>
             <p14:sldId id="259"/>
             <p14:sldId id="260"/>
           </p14:sldIdLst>
         </p14:section>
-        <p14:section name="Read-along" id="{92475dd7-ba2a-1cb8-99f6-fb0089858357}">
+        <p14:section name="Read-along" id="{9f9ffef2-e9fd-db39-e880-fcbf7a6f2a61}">
           <p14:sldIdLst>
             <p14:sldId id="261"/>
             <p14:sldId id="262"/>
           </p14:sldIdLst>
         </p14:section>
-        <p14:section name="Teach" id="{75e107d9-ebca-22ba-2df7-418d55e915a5}">
+        <p14:section name="Teach" id="{c372076d-3813-373e-4d6b-50038d27cd15}">
           <p14:sldIdLst>
             <p14:sldId id="263"/>
             <p14:sldId id="264"/>
@@ -161,7 +161,7 @@
             <p14:sldId id="268"/>
           </p14:sldIdLst>
         </p14:section>
-        <p14:section name="Routes" id="{eb9fa27b-412c-ff3a-152c-394b08f31e1e}">
+        <p14:section name="Routes" id="{1bb145aa-ab11-a6b3-eb54-f2550fd60245}">
           <p14:sldIdLst>
             <p14:sldId id="269"/>
             <p14:sldId id="270"/>
@@ -169,12 +169,12 @@
             <p14:sldId id="272"/>
           </p14:sldIdLst>
         </p14:section>
-        <p14:section name="Close" id="{ffe0a3eb-c48d-0525-3b6b-c5515ea03eb2}">
+        <p14:section name="Close" id="{0dd04332-02df-f6dd-285f-3ac355cb16b5}">
           <p14:sldIdLst>
             <p14:sldId id="273"/>
           </p14:sldIdLst>
         </p14:section>
-        <p14:section name="Answers" id="{2b409061-2278-97e9-5faa-487a71fb2ec4}">
+        <p14:section name="Answers" id="{04ae8c72-4096-fa2b-6e63-51c6f579662a}">
           <p14:sldIdLst>
             <p14:sldId id="274"/>
             <p14:sldId id="275"/>
@@ -770,7 +770,7 @@
             <a:r>
               <a:rPr lang="en-US" dirty="0"/>
               <a:t>Teach — Comparing the two dictatorships. Say it in your own words, then check understanding with a quick question: ask a pupil from the pre-teach group first, since they met these words and ideas before the lesson. Pupils try to recall before you re-explain.
-Your unit now returns to its enquiry question: to what extent were the dictatorships in Hitler's Germany and Stalin's Russia similar? Begin with the two words the skill depends on. A similarity is something that is the same, or very alike, when we compare two people, events or periods. A difference is something that is not the same: something that sets two things apart when we compare them.
+Your unit now returns to its enquiry question: to what extent were the dictatorships in Hitler's Germany and Stalin's Russia similar? Begin with the two words the skill depends on. A similarity is a feature two things share: a point where what you find in Germany you also find in the Soviet Union. A difference is a point where the two part company, and naming one is just as much historical thinking as naming a similarity.
 Work through the three themes the assessment uses. On beliefs, the two were opposites on the political spectrum from chapter 2: Nazi fascism on the far right, Soviet communism on the far left. On their rise to power, Hitler was appointed Chancellor inside a democracy and then destroyed it, while Stalin climbed the ladder of a one-party state that was already a dictatorship, winning a struggle inside the party rather than an election. On their rule, the similarities crowd in: a secret police force, terror used against their own supporters as well as their enemies, censorship and propaganda, control of schools and of young people, and a leader built up until criticism became unthinkable.
 The skill, then, is not to list. It is to make a claim about where the two line up and where they part, and to prove each claim with evidence from both countries. Use the connecting word Similarly for a similarity and a contrast phrase such as whereas for a difference, and finish every paragraph by saying what your evidence shows.
 Worked example — model it step by step, thinking aloud: Write a paragraph explaining one similarity between how Hitler and Stalin kept control of their countries. (1) Point: name the similarity. One similarity in how Hitler and Stalin kept control is that both relied on a secret police force. (2) Evidence for Germany: the Gestapo used informers, surveillance and house searches and did not need hard evidence to act. (3) Evidence for the USSR, introduced with Similarly: similarly, the NKVD could arrest a person on an anonymous tip-off, and by 1934 it was no longer restricted by law. (4) Explain and link: this meant that in both countries people policed their own conversations, so opposition could not organise. Therefore the two dictatorships were strongly similar in this respect. Answer: Point, evidence from Germany, Similarly plus evidence from the USSR, then explain and link: both used a secret police that needed no proof, so fear prevented opposition from forming in either country..
@@ -863,7 +863,7 @@
             <a:r>
               <a:rPr lang="en-US" dirty="0"/>
               <a:t>Teach — Comparing the two dictatorships. Say it in your own words, then check understanding with a quick question: ask a pupil from the pre-teach group first, since they met these words and ideas before the lesson. Pupils try to recall before you re-explain.
-Your unit now returns to its enquiry question: to what extent were the dictatorships in Hitler's Germany and Stalin's Russia similar? Begin with the two words the skill depends on. A similarity is something that is the same, or very alike, when we compare two people, events or periods. A difference is something that is not the same: something that sets two things apart when we compare them.
+Your unit now returns to its enquiry question: to what extent were the dictatorships in Hitler's Germany and Stalin's Russia similar? Begin with the two words the skill depends on. A similarity is a feature two things share: a point where what you find in Germany you also find in the Soviet Union. A difference is a point where the two part company, and naming one is just as much historical thinking as naming a similarity.
 Work through the three themes the assessment uses. On beliefs, the two were opposites on the political spectrum from chapter 2: Nazi fascism on the far right, Soviet communism on the far left. On their rise to power, Hitler was appointed Chancellor inside a democracy and then destroyed it, while Stalin climbed the ladder of a one-party state that was already a dictatorship, winning a struggle inside the party rather than an election. On their rule, the similarities crowd in: a secret police force, terror used against their own supporters as well as their enemies, censorship and propaganda, control of schools and of young people, and a leader built up until criticism became unthinkable.
 The skill, then, is not to list. It is to make a claim about where the two line up and where they part, and to prove each claim with evidence from both countries. Use the connecting word Similarly for a similarity and a contrast phrase such as whereas for a difference, and finish every paragraph by saying what your evidence shows.
 Worked example — model it step by step, thinking aloud: Write a paragraph explaining one similarity between how Hitler and Stalin kept control of their countries. (1) Point: name the similarity. One similarity in how Hitler and Stalin kept control is that both relied on a secret police force. (2) Evidence for Germany: the Gestapo used informers, surveillance and house searches and did not need hard evidence to act. (3) Evidence for the USSR, introduced with Similarly: similarly, the NKVD could arrest a person on an anonymous tip-off, and by 1934 it was no longer restricted by law. (4) Explain and link: this meant that in both countries people policed their own conversations, so opposition could not organise. Therefore the two dictatorships were strongly similar in this respect. Answer: Point, evidence from Germany, Similarly plus evidence from the USSR, then explain and link: both used a secret police that needed no proof, so fear prevented opposition from forming in either country..
@@ -956,7 +956,7 @@
             <a:r>
               <a:rPr lang="en-US" dirty="0"/>
               <a:t>Teach — Comparing the two dictatorships. Say it in your own words, then check understanding with a quick question: ask a pupil from the pre-teach group first, since they met these words and ideas before the lesson. Pupils try to recall before you re-explain.
-Your unit now returns to its enquiry question: to what extent were the dictatorships in Hitler's Germany and Stalin's Russia similar? Begin with the two words the skill depends on. A similarity is something that is the same, or very alike, when we compare two people, events or periods. A difference is something that is not the same: something that sets two things apart when we compare them.
+Your unit now returns to its enquiry question: to what extent were the dictatorships in Hitler's Germany and Stalin's Russia similar? Begin with the two words the skill depends on. A similarity is a feature two things share: a point where what you find in Germany you also find in the Soviet Union. A difference is a point where the two part company, and naming one is just as much historical thinking as naming a similarity.
 Work through the three themes the assessment uses. On beliefs, the two were opposites on the political spectrum from chapter 2: Nazi fascism on the far right, Soviet communism on the far left. On their rise to power, Hitler was appointed Chancellor inside a democracy and then destroyed it, while Stalin climbed the ladder of a one-party state that was already a dictatorship, winning a struggle inside the party rather than an election. On their rule, the similarities crowd in: a secret police force, terror used against their own supporters as well as their enemies, censorship and propaganda, control of schools and of young people, and a leader built up until criticism became unthinkable.
 The skill, then, is not to list. It is to make a claim about where the two line up and where they part, and to prove each claim with evidence from both countries. Use the connecting word Similarly for a similarity and a contrast phrase such as whereas for a difference, and finish every paragraph by saying what your evidence shows.
 Worked example — model it step by step, thinking aloud: Write a paragraph explaining one similarity between how Hitler and Stalin kept control of their countries. (1) Point: name the similarity. One similarity in how Hitler and Stalin kept control is that both relied on a secret police force. (2) Evidence for Germany: the Gestapo used informers, surveillance and house searches and did not need hard evidence to act. (3) Evidence for the USSR, introduced with Similarly: similarly, the NKVD could arrest a person on an anonymous tip-off, and by 1934 it was no longer restricted by law. (4) Explain and link: this meant that in both countries people policed their own conversations, so opposition could not organise. Therefore the two dictatorships were strongly similar in this respect. Answer: Point, evidence from Germany, Similarly plus evidence from the USSR, then explain and link: both used a secret police that needed no proof, so fear prevented opposition from forming in either country..
@@ -1612,7 +1612,7 @@
               <a:rPr lang="en-US" dirty="0"/>
               <a:t>Do now — retrieval. Silent, no notes, no help: recall comes before any support. Give about four minutes.
 1. What was the NKVD?  →  B   Stalin's secret police, who could arrest people on an informer's word alone
-2. A ___ is something that is the same, or very alike, when we compare two people, events or periods.  →  similarity
+2. A ___ is a feature that two people, events or periods share when you compare them.  →  similarity
 3. In which year did the Purges reach their height, in what is called the Great Purge? Give the year as four digits.  →  1937
 Circulate: who gets 3/3 (Stretch route), 2/3 (Core), 0–1 (Support)? Use this to route pupils later in the lesson.</a:t>
             </a:r>
@@ -2450,9 +2450,9 @@
             <a:r>
               <a:rPr lang="en-US" dirty="0"/>
               <a:t>Teach — The NKVD and the Purges. Say it in your own words, then check understanding with a quick question: ask a pupil from the pre-teach group first, since they met these words and ideas before the lesson. Pupils try to recall before you re-explain.
-The USSR's first secret police force, the Cheka, was set up in December 1917, and to begin with it was only allowed to investigate crimes against the government's political power. It soon acquired huge powers and began a campaign of terror against anyone who disliked communism. The force kept growing, and by 1934 it was no longer restricted by law at all. Under its later name, the NKVD, Stalin used it against anyone he thought might be a threat. He was extremely suspicious, and many innocent people suffered.
+The USSR's first secret police force, the Cheka, was set up in December 1917, and to begin with it was only allowed to investigate crimes against the government's political power. Its powers grew quickly, and it was soon being used to frighten and arrest anyone thought to be against communism. The force kept growing, and by 1934 it was no longer restricted by law at all. Under its later name, the NKVD, Stalin used it against anyone he thought might be a threat. He was extremely suspicious, and many innocent people suffered.
 The NKVD did not need hard evidence to act. A tip-off from an anonymous informer was considered enough reason for an arrest, and the use of torture was authorised by a special decree of the state. Compare that with the Gestapo in chapter 4 and you have one of the clearest similarities in the whole unit.
-Stalin's use of terror led to the Purges: a period in which he removed anyone who opposed his rule, and anyone he believed might become a threat. The Purges mostly ran between 1936 and 1938, and reached their height with the Great Purge of 1937. The deck gives the figures plainly, and so will we: 750,000 people were executed, and a million were sent to the Gulags, the forced labour camps. Many of Stalin's political enemies were put on show trials, where they confessed, after torture, to crimes they could not possibly have committed. Earlier, in 1934, Kirov, the popular leader of the Leningrad party and an old friend of Stalin's, was murdered, probably on Stalin's own orders.
+Stalin's use of terror led to the Purges: a period in which he removed anyone who opposed his rule, and anyone he believed might become a threat. The Purges mostly ran between 1936 and 1938, and reached their height with the Great Purge of 1937. The deck gives the figures plainly, and so will we: 750,000 people were executed, and a million were sent to the Gulags, the forced labour camps. Stalin's political opponents were often tried in public, having been tortured into confessing to crimes nobody could have committed. Earlier, in 1934, Kirov, the popular leader of the Leningrad party and an old friend of Stalin's, was murdered, probably on Stalin's own orders.
 Tip: Terror in the USSR reached inside the ruling party, not only outside it. That is the detail that makes the comparison with the Night of the Long Knives work.</a:t>
             </a:r>
             <a:endParaRPr lang="en-US" dirty="0"/>
@@ -2544,7 +2544,7 @@
               <a:t>Teach — The cult of personality and the control of culture. Say it in your own words, then check understanding with a quick question: ask a pupil from the pre-teach group first, since they met these words and ideas before the lesson. Pupils try to recall before you re-explain.
 Your lesson opens with two photographs. The first shows Lenin speaking to a large crowd, with Trotsky standing in support beside him; it was a photograph taken in 1920. The second shows the same scene with Trotsky removed. Nothing was added: somebody simply deleted a man from the record. History was rewritten to glorify Stalin's part in the revolution, photographs were faked to place him at Lenin's side, and images of Trotsky and other earlier leaders were taken out.
 Alongside the deletions came the tributes. Images of Stalin, statues, songs, poems and books about his greatness were everywhere, and nobody would have dared show him in a bad light. Towns, villages and cities were renamed after him, and prizes were named in his honour. He awarded himself a string of grand titles, which historians quote only to show how far the flattery went; we will describe them rather than repeat them. Sculptors made his statues taller and broader than he was. During the Second World War his name was written into the national anthem, and he was credited with almost god-like qualities, including the suggestion that he had won the war single-handed. This is what historians mean by a cult of personality.
-Culture was controlled to match. Writers had to belong to the party-controlled Union of Soviet Writers, and books that did not follow the party line were changed or destroyed. Writers, artists, film-makers and composers had to follow the policy of Socialist Realism: their work had to deal with the lives of ordinary working people, show communism developing, and give simple, clear, optimistic messages.
+Culture was controlled to match. Writers had to belong to the party-controlled Union of Soviet Writers, and any book that strayed from what the Party wanted was rewritten or destroyed. Everyone who made art — writers, painters, film-makers, composers — had to work to the policy of Socialist Realism: their work had to deal with the lives of ordinary working people, show communism developing, and give simple, clear, optimistic messages.
 Tip: A cult of personality is propaganda pointed at one person. If you can name the statues, the renamed cities and the rewritten history, you can explain it in a sentence.</a:t>
             </a:r>
             <a:endParaRPr lang="en-US" dirty="0"/>
@@ -12139,7 +12139,7 @@
               <a:buNone/>
             </a:pPr>
             <a:r>
-              <a:rPr lang="en-US" sz="2000" b="1" dirty="0">
+              <a:rPr lang="en-US" sz="2200" b="1" dirty="0">
                 <a:solidFill>
                   <a:srgbClr val="1E2229"/>
                 </a:solidFill>
@@ -12147,16 +12147,16 @@
                 <a:ea typeface="Calibri" pitchFamily="34" charset="-122"/>
                 <a:cs typeface="Calibri" pitchFamily="34" charset="-120"/>
               </a:rPr>
-              <a:t>A ___ is something that is the same, or very alike, when we compare two people, events or periods.</a:t>
-            </a:r>
-            <a:endParaRPr lang="en-US" sz="2000" dirty="0"/>
-          </a:p>
-          <a:p>
-            <a:pPr algn="l" indent="0" marL="0">
-              <a:buNone/>
-            </a:pPr>
-            <a:r>
-              <a:rPr lang="en-US" sz="2000" b="1" dirty="0">
+              <a:t>A ___ is a feature that two people, events or periods share when you compare them.</a:t>
+            </a:r>
+            <a:endParaRPr lang="en-US" sz="2200" dirty="0"/>
+          </a:p>
+          <a:p>
+            <a:pPr algn="l" indent="0" marL="0">
+              <a:buNone/>
+            </a:pPr>
+            <a:r>
+              <a:rPr lang="en-US" sz="2200" b="1" dirty="0">
                 <a:solidFill>
                   <a:srgbClr val="7A4A1E"/>
                 </a:solidFill>
@@ -12170,7 +12170,7 @@
               <a:buNone/>
             </a:pPr>
             <a:r>
-              <a:rPr lang="en-US" sz="2000" dirty="0">
+              <a:rPr lang="en-US" sz="2200" dirty="0">
                 <a:solidFill>
                   <a:srgbClr val="1E2229"/>
                 </a:solidFill>
@@ -12180,7 +12180,7 @@
               </a:rPr>
               <a:t>similarity  ·  difference  ·  judgement</a:t>
             </a:r>
-            <a:endParaRPr lang="en-US" sz="2000" dirty="0"/>
+            <a:endParaRPr lang="en-US" sz="2200" dirty="0"/>
           </a:p>
         </p:txBody>
       </p:sp>
@@ -18888,7 +18888,7 @@
                 <a:ea typeface="Calibri" pitchFamily="34" charset="-122"/>
                 <a:cs typeface="Calibri" pitchFamily="34" charset="-120"/>
               </a:rPr>
-              <a:t>Culture was controlled to match. Writers had to belong to the party-controlled Union of Soviet Writers, and books that did not follow the party line were changed or destroyed.</a:t>
+              <a:t>Culture was controlled to match. Writers had to belong to the party-controlled Union of Soviet Writers, and any book that strayed from what the Party wanted was rewritten or destroyed.</a:t>
             </a:r>
             <a:endParaRPr lang="en-US" sz="1800" dirty="0"/>
           </a:p>
